--- a/media/resources/files/Onduktar_Sandardy_iReettoo_Sandyk_Bashkatyrma_TEczjnB.pptx
+++ b/media/resources/files/Onduktar_Sandardy_iReettoo_Sandyk_Bashkatyrma_TEczjnB.pptx
@@ -6301,7 +6301,7 @@
                 <a:ea typeface="+mn-ea"/>
                 <a:cs typeface="+mn-cs"/>
               </a:rPr>
-              <a:t>Турдуу пикирлер учун ыраазычылык билдиребиз.</a:t>
+              <a:t>Түрдүү пикирлер үчүн ыраазычылык билдиребиз.</a:t>
             </a:r>
           </a:p>
           <a:p>

--- a/media/resources/files/Onduktar_Sandardy_iReettoo_Sandyk_Bashkatyrma_TEczjnB.pptx
+++ b/media/resources/files/Onduktar_Sandardy_iReettoo_Sandyk_Bashkatyrma_TEczjnB.pptx
@@ -4788,7 +4788,7 @@
             <a:pPr algn="ctr"/>
             <a:r>
               <a:rPr lang="ru-RU" sz="1200" dirty="0"/>
-              <a:t>Ондуктардын бул иреттээлген тизмесин </a:t>
+              <a:t>Ондуктардын бул ирээттелген тизмесин </a:t>
             </a:r>
           </a:p>
           <a:p>
